--- a/instructor/slides/pptx/labs/23-expand-order-lines-flatmap.pptx
+++ b/instructor/slides/pptx/labs/23-expand-order-lines-flatmap.pptx
@@ -4021,8 +4021,8 @@
         </p:nvSpPr>
         <p:spPr>
           <a:xfrm>
-            <a:off x="640080" y="1920240"/>
-            <a:ext cx="10972800" cy="1463040"/>
+            <a:off x="640080" y="1828800"/>
+            <a:ext cx="6675120" cy="1645920"/>
           </a:xfrm>
           <a:prstGeom prst="rect">
             <a:avLst/>
@@ -4036,7 +4036,7 @@
           <a:lstStyle/>
           <a:p>
             <a:r>
-              <a:rPr sz="4400" b="1">
+              <a:rPr sz="4000" b="1">
                 <a:solidFill>
                   <a:srgbClr val="FFFFFF"/>
                 </a:solidFill>
@@ -4055,8 +4055,8 @@
         </p:nvSpPr>
         <p:spPr>
           <a:xfrm>
-            <a:off x="640080" y="3657600"/>
-            <a:ext cx="10789920" cy="1097280"/>
+            <a:off x="640080" y="3794760"/>
+            <a:ext cx="6675120" cy="1097280"/>
           </a:xfrm>
           <a:prstGeom prst="rect">
             <a:avLst/>
@@ -4070,7 +4070,7 @@
           <a:lstStyle/>
           <a:p>
             <a:r>
-              <a:rPr sz="2000" b="0">
+              <a:rPr sz="1800" b="0">
                 <a:solidFill>
                   <a:srgbClr val="B7CBDE"/>
                 </a:solidFill>
@@ -4089,8 +4089,8 @@
         </p:nvSpPr>
         <p:spPr>
           <a:xfrm>
-            <a:off x="640080" y="5029200"/>
-            <a:ext cx="10972800" cy="457200"/>
+            <a:off x="640080" y="5120640"/>
+            <a:ext cx="6766560" cy="457200"/>
           </a:xfrm>
           <a:prstGeom prst="rect">
             <a:avLst/>
@@ -4104,7 +4104,7 @@
           <a:lstStyle/>
           <a:p>
             <a:r>
-              <a:rPr sz="1600" b="0">
+              <a:rPr sz="1500" b="0">
                 <a:solidFill>
                   <a:srgbClr val="3EC6FF"/>
                 </a:solidFill>
@@ -4115,6 +4115,30 @@
           </a:p>
         </p:txBody>
       </p:sp>
+      <p:pic>
+        <p:nvPicPr>
+          <p:cNvPr id="7" name="Picture 6" descr="dw-group-reduce.jpg"/>
+          <p:cNvPicPr>
+            <a:picLocks noChangeAspect="1"/>
+          </p:cNvPicPr>
+          <p:nvPr/>
+        </p:nvPicPr>
+        <p:blipFill>
+          <a:blip r:embed="rId2"/>
+          <a:stretch>
+            <a:fillRect/>
+          </a:stretch>
+        </p:blipFill>
+        <p:spPr>
+          <a:xfrm>
+            <a:off x="7452360" y="1325880"/>
+            <a:ext cx="4160520" cy="4160520"/>
+          </a:xfrm>
+          <a:prstGeom prst="rect">
+            <a:avLst/>
+          </a:prstGeom>
+        </p:spPr>
+      </p:pic>
     </p:spTree>
   </p:cSld>
   <p:clrMapOvr>
@@ -4218,8 +4242,8 @@
         </p:nvSpPr>
         <p:spPr>
           <a:xfrm>
-            <a:off x="640080" y="685800"/>
-            <a:ext cx="10972800" cy="1463040"/>
+            <a:off x="640080" y="658368"/>
+            <a:ext cx="7863840" cy="1645920"/>
           </a:xfrm>
           <a:prstGeom prst="rect">
             <a:avLst/>
@@ -4233,7 +4257,7 @@
           <a:lstStyle/>
           <a:p>
             <a:r>
-              <a:rPr sz="3200" b="1">
+              <a:rPr sz="3000" b="1">
                 <a:solidFill>
                   <a:srgbClr val="FFFFFF"/>
                 </a:solidFill>
@@ -4252,8 +4276,8 @@
         </p:nvSpPr>
         <p:spPr>
           <a:xfrm>
-            <a:off x="777240" y="2286000"/>
-            <a:ext cx="10607040" cy="4754880"/>
+            <a:off x="777240" y="2331720"/>
+            <a:ext cx="7498079" cy="4754880"/>
           </a:xfrm>
           <a:prstGeom prst="rect">
             <a:avLst/>
@@ -4272,7 +4296,7 @@
               </a:spcAft>
             </a:pPr>
             <a:r>
-              <a:rPr sz="2400" b="0">
+              <a:rPr sz="2200" b="0">
                 <a:solidFill>
                   <a:srgbClr val="FFFFFF"/>
                 </a:solidFill>
@@ -4288,7 +4312,7 @@
               </a:spcAft>
             </a:pPr>
             <a:r>
-              <a:rPr sz="2400" b="0">
+              <a:rPr sz="2200" b="0">
                 <a:solidFill>
                   <a:srgbClr val="FFFFFF"/>
                 </a:solidFill>
@@ -4299,6 +4323,30 @@
           </a:p>
         </p:txBody>
       </p:sp>
+      <p:pic>
+        <p:nvPicPr>
+          <p:cNvPr id="6" name="Picture 5" descr="dw-group-reduce.jpg"/>
+          <p:cNvPicPr>
+            <a:picLocks noChangeAspect="1"/>
+          </p:cNvPicPr>
+          <p:nvPr/>
+        </p:nvPicPr>
+        <p:blipFill>
+          <a:blip r:embed="rId2"/>
+          <a:stretch>
+            <a:fillRect/>
+          </a:stretch>
+        </p:blipFill>
+        <p:spPr>
+          <a:xfrm>
+            <a:off x="8732520" y="2057400"/>
+            <a:ext cx="2880360" cy="2880360"/>
+          </a:xfrm>
+          <a:prstGeom prst="rect">
+            <a:avLst/>
+          </a:prstGeom>
+        </p:spPr>
+      </p:pic>
     </p:spTree>
   </p:cSld>
   <p:clrMapOvr>
@@ -4402,8 +4450,8 @@
         </p:nvSpPr>
         <p:spPr>
           <a:xfrm>
-            <a:off x="640080" y="685800"/>
-            <a:ext cx="10972800" cy="1463040"/>
+            <a:off x="640080" y="658368"/>
+            <a:ext cx="7863840" cy="1645920"/>
           </a:xfrm>
           <a:prstGeom prst="rect">
             <a:avLst/>
@@ -4417,7 +4465,7 @@
           <a:lstStyle/>
           <a:p>
             <a:r>
-              <a:rPr sz="3200" b="1">
+              <a:rPr sz="3000" b="1">
                 <a:solidFill>
                   <a:srgbClr val="FFFFFF"/>
                 </a:solidFill>
@@ -4436,8 +4484,8 @@
         </p:nvSpPr>
         <p:spPr>
           <a:xfrm>
-            <a:off x="777240" y="2286000"/>
-            <a:ext cx="10607040" cy="4754880"/>
+            <a:off x="777240" y="2331720"/>
+            <a:ext cx="7498079" cy="4754880"/>
           </a:xfrm>
           <a:prstGeom prst="rect">
             <a:avLst/>
@@ -4456,7 +4504,7 @@
               </a:spcAft>
             </a:pPr>
             <a:r>
-              <a:rPr sz="2400" b="0">
+              <a:rPr sz="2200" b="0">
                 <a:solidFill>
                   <a:srgbClr val="FFFFFF"/>
                 </a:solidFill>
@@ -4467,6 +4515,30 @@
           </a:p>
         </p:txBody>
       </p:sp>
+      <p:pic>
+        <p:nvPicPr>
+          <p:cNvPr id="6" name="Picture 5" descr="dw-group-reduce.jpg"/>
+          <p:cNvPicPr>
+            <a:picLocks noChangeAspect="1"/>
+          </p:cNvPicPr>
+          <p:nvPr/>
+        </p:nvPicPr>
+        <p:blipFill>
+          <a:blip r:embed="rId2"/>
+          <a:stretch>
+            <a:fillRect/>
+          </a:stretch>
+        </p:blipFill>
+        <p:spPr>
+          <a:xfrm>
+            <a:off x="8732520" y="2057400"/>
+            <a:ext cx="2880360" cy="2880360"/>
+          </a:xfrm>
+          <a:prstGeom prst="rect">
+            <a:avLst/>
+          </a:prstGeom>
+        </p:spPr>
+      </p:pic>
     </p:spTree>
   </p:cSld>
   <p:clrMapOvr>
@@ -4570,8 +4642,8 @@
         </p:nvSpPr>
         <p:spPr>
           <a:xfrm>
-            <a:off x="640080" y="685800"/>
-            <a:ext cx="10972800" cy="1463040"/>
+            <a:off x="640080" y="658368"/>
+            <a:ext cx="10972800" cy="1645920"/>
           </a:xfrm>
           <a:prstGeom prst="rect">
             <a:avLst/>
@@ -4585,7 +4657,7 @@
           <a:lstStyle/>
           <a:p>
             <a:r>
-              <a:rPr sz="3200" b="1">
+              <a:rPr sz="3000" b="1">
                 <a:solidFill>
                   <a:srgbClr val="FFFFFF"/>
                 </a:solidFill>
@@ -4883,8 +4955,8 @@
         </p:nvSpPr>
         <p:spPr>
           <a:xfrm>
-            <a:off x="640080" y="685800"/>
-            <a:ext cx="10972800" cy="1463040"/>
+            <a:off x="640080" y="658368"/>
+            <a:ext cx="7863840" cy="1645920"/>
           </a:xfrm>
           <a:prstGeom prst="rect">
             <a:avLst/>
@@ -4898,7 +4970,7 @@
           <a:lstStyle/>
           <a:p>
             <a:r>
-              <a:rPr sz="3200" b="1">
+              <a:rPr sz="3000" b="1">
                 <a:solidFill>
                   <a:srgbClr val="FFFFFF"/>
                 </a:solidFill>
@@ -4917,8 +4989,8 @@
         </p:nvSpPr>
         <p:spPr>
           <a:xfrm>
-            <a:off x="777240" y="2286000"/>
-            <a:ext cx="10607040" cy="4754880"/>
+            <a:off x="777240" y="2331720"/>
+            <a:ext cx="7498079" cy="4754880"/>
           </a:xfrm>
           <a:prstGeom prst="rect">
             <a:avLst/>
@@ -4937,7 +5009,7 @@
               </a:spcAft>
             </a:pPr>
             <a:r>
-              <a:rPr sz="2400" b="0">
+              <a:rPr sz="2200" b="0">
                 <a:solidFill>
                   <a:srgbClr val="FFB020"/>
                 </a:solidFill>
@@ -4953,7 +5025,7 @@
               </a:spcAft>
             </a:pPr>
             <a:r>
-              <a:rPr sz="2400" b="0">
+              <a:rPr sz="2200" b="0">
                 <a:solidFill>
                   <a:srgbClr val="FFB020"/>
                 </a:solidFill>
@@ -4969,7 +5041,7 @@
               </a:spcAft>
             </a:pPr>
             <a:r>
-              <a:rPr sz="2400" b="0">
+              <a:rPr sz="2200" b="0">
                 <a:solidFill>
                   <a:srgbClr val="FFB020"/>
                 </a:solidFill>
@@ -4985,7 +5057,7 @@
               </a:spcAft>
             </a:pPr>
             <a:r>
-              <a:rPr sz="2400" b="0">
+              <a:rPr sz="2200" b="0">
                 <a:solidFill>
                   <a:srgbClr val="FFB020"/>
                 </a:solidFill>
@@ -4996,6 +5068,30 @@
           </a:p>
         </p:txBody>
       </p:sp>
+      <p:pic>
+        <p:nvPicPr>
+          <p:cNvPr id="6" name="Picture 5" descr="dw-pause.jpg"/>
+          <p:cNvPicPr>
+            <a:picLocks noChangeAspect="1"/>
+          </p:cNvPicPr>
+          <p:nvPr/>
+        </p:nvPicPr>
+        <p:blipFill>
+          <a:blip r:embed="rId2"/>
+          <a:stretch>
+            <a:fillRect/>
+          </a:stretch>
+        </p:blipFill>
+        <p:spPr>
+          <a:xfrm>
+            <a:off x="8366760" y="1874519"/>
+            <a:ext cx="3246120" cy="3246120"/>
+          </a:xfrm>
+          <a:prstGeom prst="rect">
+            <a:avLst/>
+          </a:prstGeom>
+        </p:spPr>
+      </p:pic>
     </p:spTree>
   </p:cSld>
   <p:clrMapOvr>
@@ -5099,8 +5195,8 @@
         </p:nvSpPr>
         <p:spPr>
           <a:xfrm>
-            <a:off x="640080" y="685800"/>
-            <a:ext cx="10972800" cy="1463040"/>
+            <a:off x="640080" y="658368"/>
+            <a:ext cx="7863840" cy="1645920"/>
           </a:xfrm>
           <a:prstGeom prst="rect">
             <a:avLst/>
@@ -5114,7 +5210,7 @@
           <a:lstStyle/>
           <a:p>
             <a:r>
-              <a:rPr sz="3200" b="1">
+              <a:rPr sz="3000" b="1">
                 <a:solidFill>
                   <a:srgbClr val="FFFFFF"/>
                 </a:solidFill>
@@ -5133,8 +5229,8 @@
         </p:nvSpPr>
         <p:spPr>
           <a:xfrm>
-            <a:off x="777240" y="2286000"/>
-            <a:ext cx="10607040" cy="4754880"/>
+            <a:off x="777240" y="2331720"/>
+            <a:ext cx="7498079" cy="4754880"/>
           </a:xfrm>
           <a:prstGeom prst="rect">
             <a:avLst/>
@@ -5153,7 +5249,7 @@
               </a:spcAft>
             </a:pPr>
             <a:r>
-              <a:rPr sz="2400" b="0">
+              <a:rPr sz="2200" b="0">
                 <a:solidFill>
                   <a:srgbClr val="FFFFFF"/>
                 </a:solidFill>
@@ -5169,7 +5265,7 @@
               </a:spcAft>
             </a:pPr>
             <a:r>
-              <a:rPr sz="2400" b="0">
+              <a:rPr sz="2200" b="0">
                 <a:solidFill>
                   <a:srgbClr val="FFFFFF"/>
                 </a:solidFill>
@@ -5180,6 +5276,30 @@
           </a:p>
         </p:txBody>
       </p:sp>
+      <p:pic>
+        <p:nvPicPr>
+          <p:cNvPr id="6" name="Picture 5" descr="dw-group-reduce.jpg"/>
+          <p:cNvPicPr>
+            <a:picLocks noChangeAspect="1"/>
+          </p:cNvPicPr>
+          <p:nvPr/>
+        </p:nvPicPr>
+        <p:blipFill>
+          <a:blip r:embed="rId2"/>
+          <a:stretch>
+            <a:fillRect/>
+          </a:stretch>
+        </p:blipFill>
+        <p:spPr>
+          <a:xfrm>
+            <a:off x="8732520" y="2057400"/>
+            <a:ext cx="2880360" cy="2880360"/>
+          </a:xfrm>
+          <a:prstGeom prst="rect">
+            <a:avLst/>
+          </a:prstGeom>
+        </p:spPr>
+      </p:pic>
     </p:spTree>
   </p:cSld>
   <p:clrMapOvr>
@@ -5283,8 +5403,8 @@
         </p:nvSpPr>
         <p:spPr>
           <a:xfrm>
-            <a:off x="640080" y="685800"/>
-            <a:ext cx="10972800" cy="1463040"/>
+            <a:off x="640080" y="658368"/>
+            <a:ext cx="10972800" cy="1645920"/>
           </a:xfrm>
           <a:prstGeom prst="rect">
             <a:avLst/>
@@ -5298,7 +5418,7 @@
           <a:lstStyle/>
           <a:p>
             <a:r>
-              <a:rPr sz="3200" b="1">
+              <a:rPr sz="3000" b="1">
                 <a:solidFill>
                   <a:srgbClr val="FFFFFF"/>
                 </a:solidFill>
@@ -5612,8 +5732,8 @@
         </p:nvSpPr>
         <p:spPr>
           <a:xfrm>
-            <a:off x="640080" y="685800"/>
-            <a:ext cx="10972800" cy="1463040"/>
+            <a:off x="640080" y="658368"/>
+            <a:ext cx="10972800" cy="1645920"/>
           </a:xfrm>
           <a:prstGeom prst="rect">
             <a:avLst/>
@@ -5627,7 +5747,7 @@
           <a:lstStyle/>
           <a:p>
             <a:r>
-              <a:rPr sz="3200" b="1">
+              <a:rPr sz="3000" b="1">
                 <a:solidFill>
                   <a:srgbClr val="FFFFFF"/>
                 </a:solidFill>
@@ -5845,8 +5965,8 @@
         </p:nvSpPr>
         <p:spPr>
           <a:xfrm>
-            <a:off x="640080" y="685800"/>
-            <a:ext cx="10972800" cy="1463040"/>
+            <a:off x="640080" y="658368"/>
+            <a:ext cx="7863840" cy="1645920"/>
           </a:xfrm>
           <a:prstGeom prst="rect">
             <a:avLst/>
@@ -5860,7 +5980,7 @@
           <a:lstStyle/>
           <a:p>
             <a:r>
-              <a:rPr sz="3200" b="1">
+              <a:rPr sz="3000" b="1">
                 <a:solidFill>
                   <a:srgbClr val="FFFFFF"/>
                 </a:solidFill>
@@ -5879,8 +5999,8 @@
         </p:nvSpPr>
         <p:spPr>
           <a:xfrm>
-            <a:off x="777240" y="2286000"/>
-            <a:ext cx="10607040" cy="4754880"/>
+            <a:off x="777240" y="2331720"/>
+            <a:ext cx="7498079" cy="4754880"/>
           </a:xfrm>
           <a:prstGeom prst="rect">
             <a:avLst/>
@@ -5899,7 +6019,7 @@
               </a:spcAft>
             </a:pPr>
             <a:r>
-              <a:rPr sz="2400" b="0">
+              <a:rPr sz="2200" b="0">
                 <a:solidFill>
                   <a:srgbClr val="FFFFFF"/>
                 </a:solidFill>
@@ -5915,7 +6035,7 @@
               </a:spcAft>
             </a:pPr>
             <a:r>
-              <a:rPr sz="2400" b="0">
+              <a:rPr sz="2200" b="0">
                 <a:solidFill>
                   <a:srgbClr val="FFFFFF"/>
                 </a:solidFill>
@@ -5931,7 +6051,7 @@
               </a:spcAft>
             </a:pPr>
             <a:r>
-              <a:rPr sz="2400" b="0">
+              <a:rPr sz="2200" b="0">
                 <a:solidFill>
                   <a:srgbClr val="FFFFFF"/>
                 </a:solidFill>
@@ -5942,6 +6062,30 @@
           </a:p>
         </p:txBody>
       </p:sp>
+      <p:pic>
+        <p:nvPicPr>
+          <p:cNvPr id="6" name="Picture 5" descr="dw-interview.jpg"/>
+          <p:cNvPicPr>
+            <a:picLocks noChangeAspect="1"/>
+          </p:cNvPicPr>
+          <p:nvPr/>
+        </p:nvPicPr>
+        <p:blipFill>
+          <a:blip r:embed="rId2"/>
+          <a:stretch>
+            <a:fillRect/>
+          </a:stretch>
+        </p:blipFill>
+        <p:spPr>
+          <a:xfrm>
+            <a:off x="8732520" y="2057400"/>
+            <a:ext cx="2880360" cy="2880360"/>
+          </a:xfrm>
+          <a:prstGeom prst="rect">
+            <a:avLst/>
+          </a:prstGeom>
+        </p:spPr>
+      </p:pic>
     </p:spTree>
   </p:cSld>
   <p:clrMapOvr>
